--- a/dist/초4/수학/수와연산/초4_수학_수와연산_07_소수두자리수와세자리수.pptx
+++ b/dist/초4/수학/수와연산/초4_수학_수와연산_07_소수두자리수와세자리수.pptx
@@ -120,13 +120,13 @@
   <p:extLst>
     <p:ext uri="{521415D9-36F7-43E2-AB2F-B90AF26B5E84}">
       <p14:sectionLst xmlns:p14="http://schemas.microsoft.com/office/powerpoint/2010/main">
-        <p14:section name="도입" id="{d2701cd3-6c94-4ca9-b7f5-89c564de75af}">
+        <p14:section name="도입" id="{16281729-26a1-bdae-7b20-1c7dad0374ce}">
           <p14:sldIdLst>
             <p14:sldId id="256"/>
             <p14:sldId id="257"/>
           </p14:sldIdLst>
         </p14:section>
-        <p14:section name="개념" id="{0bfc1655-3009-be27-43f6-e1e836d198a9}">
+        <p14:section name="개념" id="{74678e34-2099-a28c-0ba2-eebdee1a2845}">
           <p14:sldIdLst>
             <p14:sldId id="258"/>
             <p14:sldId id="259"/>
@@ -135,31 +135,31 @@
             <p14:sldId id="263"/>
           </p14:sldIdLst>
         </p14:section>
-        <p14:section name="연습" id="{e88e2abe-8ffe-f4ad-89e2-754b22b0e16a}">
+        <p14:section name="연습" id="{cd936177-d52e-8fe2-ca98-c57af690cf6d}">
           <p14:sldIdLst>
             <p14:sldId id="261"/>
             <p14:sldId id="264"/>
           </p14:sldIdLst>
         </p14:section>
-        <p14:section name="개념" id="{4f13a222-033a-bb29-c834-c53e72d06d37}">
+        <p14:section name="개념" id="{3595b80b-60aa-8be2-aa14-e547fc7ec082}">
           <p14:sldIdLst/>
         </p14:section>
-        <p14:section name="연습" id="{97e93241-1d24-7c3a-2d7b-12ad2dbebc13}">
+        <p14:section name="연습" id="{8e437727-becc-2b53-59f9-95fd2bc00747}">
           <p14:sldIdLst/>
         </p14:section>
-        <p14:section name="확인" id="{658b4e66-3ecf-c42d-52c5-89afac6c16d9}">
+        <p14:section name="확인" id="{afb2d084-9ce8-fea7-e6f3-d54f4dfbd2f6}">
           <p14:sldIdLst>
             <p14:sldId id="265"/>
             <p14:sldId id="266"/>
             <p14:sldId id="267"/>
           </p14:sldIdLst>
         </p14:section>
-        <p14:section name="정리" id="{708e7432-f45e-5dd2-b30b-435b1df1dd17}">
+        <p14:section name="정리" id="{48ab122a-45f1-fb8c-2997-ee127c428284}">
           <p14:sldIdLst>
             <p14:sldId id="268"/>
           </p14:sldIdLst>
         </p14:section>
-        <p14:section name="보충" id="{7a31391f-11de-d625-cd5e-9f4f86a806e7}">
+        <p14:section name="보충" id="{fac57785-e9ec-055e-1375-150bae5894e0}">
           <p14:sldIdLst>
             <p14:sldId id="269"/>
           </p14:sldIdLst>
@@ -6557,7 +6557,7 @@
               <a:buNone/>
             </a:pPr>
             <a:r>
-              <a:rPr lang="ko-KR" altLang="en-US" sz="3000" dirty="0">
+              <a:rPr lang="en-US" altLang="ko-KR" sz="3000" dirty="0">
                 <a:solidFill>
                   <a:srgbClr val="1F2937"/>
                 </a:solidFill>
@@ -6635,7 +6635,7 @@
               <a:buNone/>
             </a:pPr>
             <a:r>
-              <a:rPr lang="ko-KR" altLang="en-US" sz="3000" dirty="0">
+              <a:rPr lang="en-US" altLang="ko-KR" sz="3000" dirty="0">
                 <a:solidFill>
                   <a:srgbClr val="1F2937"/>
                 </a:solidFill>
@@ -6838,7 +6838,7 @@
               <a:buNone/>
             </a:pPr>
             <a:r>
-              <a:rPr lang="ko-KR" altLang="en-US" sz="3000" dirty="0">
+              <a:rPr lang="en-US" altLang="ko-KR" sz="3000" dirty="0">
                 <a:solidFill>
                   <a:srgbClr val="1F2937"/>
                 </a:solidFill>
@@ -14991,7 +14991,7 @@
               <a:buNone/>
             </a:pPr>
             <a:r>
-              <a:rPr lang="ko-KR" altLang="en-US" sz="3000" b="1" dirty="0">
+              <a:rPr lang="en-US" altLang="ko-KR" sz="3000" b="1" dirty="0">
                 <a:solidFill>
                   <a:srgbClr val="1F2937"/>
                 </a:solidFill>
@@ -22829,7 +22829,7 @@
               <a:buNone/>
             </a:pPr>
             <a:r>
-              <a:rPr lang="ko-KR" altLang="en-US" sz="3000" b="1" dirty="0">
+              <a:rPr lang="en-US" altLang="ko-KR" sz="3000" b="1" dirty="0">
                 <a:solidFill>
                   <a:srgbClr val="1F2937"/>
                 </a:solidFill>
